--- a/Documentazione/Documentazione finale/BugBoard26.pptx
+++ b/Documentazione/Documentazione finale/BugBoard26.pptx
@@ -126,7 +126,7 @@
 <file path=ppt/revisionInfo.xml><?xml version="1.0" encoding="utf-8"?>
 <p1510:revInfo xmlns:a="http://schemas.openxmlformats.org/drawingml/2006/main" xmlns:r="http://schemas.openxmlformats.org/officeDocument/2006/relationships" xmlns:p1510="http://schemas.microsoft.com/office/powerpoint/2015/10/main">
   <p1510:revLst>
-    <p1510:client id="{CE379A45-D79F-8CA5-97CD-7D491D840645}" v="10" dt="2026-03-01T11:29:16.846"/>
+    <p1510:client id="{CE379A45-D79F-8CA5-97CD-7D491D840645}" v="20" dt="2026-03-01T12:05:53.272"/>
   </p1510:revLst>
 </p1510:revInfo>
 </file>
@@ -9171,10 +9171,10 @@
                 <a:ea typeface="Calibri"/>
                 <a:cs typeface="Calibri"/>
               </a:rPr>
-              <a:t>Interfaccia responsive per desktop, tablet e mobile. </a:t>
-            </a:r>
-            <a:r>
-              <a:rPr lang="en-US" sz="1050" dirty="0" err="1">
+              <a:t>Interfaccia responsive per desktop, tablet </a:t>
+            </a:r>
+            <a:r>
+              <a:rPr lang="en-US" sz="1050">
                 <a:solidFill>
                   <a:srgbClr val="1A1F3C"/>
                 </a:solidFill>
@@ -9182,86 +9182,9 @@
                 <a:ea typeface="Calibri"/>
                 <a:cs typeface="Calibri"/>
               </a:rPr>
-              <a:t>Terminologia</a:t>
-            </a:r>
-            <a:r>
-              <a:rPr lang="en-US" sz="1050" dirty="0">
-                <a:solidFill>
-                  <a:srgbClr val="1A1F3C"/>
-                </a:solidFill>
-                <a:latin typeface="Calibri"/>
-                <a:ea typeface="Calibri"/>
-                <a:cs typeface="Calibri"/>
-              </a:rPr>
-              <a:t> </a:t>
-            </a:r>
-            <a:r>
-              <a:rPr lang="en-US" sz="1050" dirty="0" err="1">
-                <a:solidFill>
-                  <a:srgbClr val="1A1F3C"/>
-                </a:solidFill>
-                <a:latin typeface="Calibri"/>
-                <a:ea typeface="Calibri"/>
-                <a:cs typeface="Calibri"/>
-              </a:rPr>
-              <a:t>coerente</a:t>
-            </a:r>
-            <a:r>
-              <a:rPr lang="en-US" sz="1050" dirty="0">
-                <a:solidFill>
-                  <a:srgbClr val="1A1F3C"/>
-                </a:solidFill>
-                <a:latin typeface="Calibri"/>
-                <a:ea typeface="Calibri"/>
-                <a:cs typeface="Calibri"/>
-              </a:rPr>
-              <a:t> con il </a:t>
-            </a:r>
-            <a:r>
-              <a:rPr lang="en-US" sz="1050" dirty="0" err="1">
-                <a:solidFill>
-                  <a:srgbClr val="1A1F3C"/>
-                </a:solidFill>
-                <a:latin typeface="Calibri"/>
-                <a:ea typeface="Calibri"/>
-                <a:cs typeface="Calibri"/>
-              </a:rPr>
-              <a:t>glossario</a:t>
-            </a:r>
-            <a:r>
-              <a:rPr lang="en-US" sz="1050" dirty="0">
-                <a:solidFill>
-                  <a:srgbClr val="1A1F3C"/>
-                </a:solidFill>
-                <a:latin typeface="Calibri"/>
-                <a:ea typeface="Calibri"/>
-                <a:cs typeface="Calibri"/>
-              </a:rPr>
-              <a:t> del </a:t>
-            </a:r>
-            <a:r>
-              <a:rPr lang="en-US" sz="1050" dirty="0" err="1">
-                <a:solidFill>
-                  <a:srgbClr val="1A1F3C"/>
-                </a:solidFill>
-                <a:latin typeface="Calibri"/>
-                <a:ea typeface="Calibri"/>
-                <a:cs typeface="Calibri"/>
-              </a:rPr>
-              <a:t>progetto</a:t>
-            </a:r>
-            <a:r>
-              <a:rPr lang="en-US" sz="1050" dirty="0">
-                <a:solidFill>
-                  <a:srgbClr val="1A1F3C"/>
-                </a:solidFill>
-                <a:latin typeface="Calibri"/>
-                <a:ea typeface="Calibri"/>
-                <a:cs typeface="Calibri"/>
-              </a:rPr>
-              <a:t>.</a:t>
-            </a:r>
-            <a:endParaRPr lang="en-US" sz="1050" dirty="0">
+              <a:t>e mobile.</a:t>
+            </a:r>
+            <a:endParaRPr lang="en-US" sz="1050">
               <a:latin typeface="Calibri"/>
               <a:ea typeface="Calibri"/>
               <a:cs typeface="Calibri"/>
@@ -10842,24 +10765,193 @@
           <a:ln/>
         </p:spPr>
         <p:txBody>
-          <a:bodyPr wrap="square" rtlCol="0" anchor="ctr"/>
+          <a:bodyPr wrap="square" lIns="91440" tIns="45720" rIns="91440" bIns="45720" rtlCol="0" anchor="ctr"/>
           <a:lstStyle/>
           <a:p>
             <a:pPr marL="0" indent="0">
               <a:buNone/>
             </a:pPr>
             <a:r>
+              <a:rPr lang="en-US" sz="1200" dirty="0" err="1">
+                <a:solidFill>
+                  <a:srgbClr val="FFFFFF"/>
+                </a:solidFill>
+                <a:latin typeface="Calibri"/>
+                <a:ea typeface="Calibri"/>
+                <a:cs typeface="Calibri"/>
+              </a:rPr>
+              <a:t>L'intero</a:t>
+            </a:r>
+            <a:r>
               <a:rPr lang="en-US" sz="1200" dirty="0">
                 <a:solidFill>
                   <a:srgbClr val="FFFFFF"/>
                 </a:solidFill>
-                <a:latin typeface="Calibri" pitchFamily="34" charset="0"/>
-                <a:ea typeface="Calibri" pitchFamily="34" charset="-122"/>
-                <a:cs typeface="Calibri" pitchFamily="34" charset="-120"/>
-              </a:rPr>
-              <a:t>L'intero stack è containerizzato con Docker Compose, che orchestra 5 container con rete interna condivisa e volumi persistenti per i dati.</a:t>
-            </a:r>
-            <a:endParaRPr lang="en-US" sz="1200" dirty="0"/>
+                <a:latin typeface="Calibri"/>
+                <a:ea typeface="Calibri"/>
+                <a:cs typeface="Calibri"/>
+              </a:rPr>
+              <a:t> stack è </a:t>
+            </a:r>
+            <a:r>
+              <a:rPr lang="en-US" sz="1200" dirty="0" err="1">
+                <a:solidFill>
+                  <a:srgbClr val="FFFFFF"/>
+                </a:solidFill>
+                <a:latin typeface="Calibri"/>
+                <a:ea typeface="Calibri"/>
+                <a:cs typeface="Calibri"/>
+              </a:rPr>
+              <a:t>containerizzato</a:t>
+            </a:r>
+            <a:r>
+              <a:rPr lang="en-US" sz="1200" dirty="0">
+                <a:solidFill>
+                  <a:srgbClr val="FFFFFF"/>
+                </a:solidFill>
+                <a:latin typeface="Calibri"/>
+                <a:ea typeface="Calibri"/>
+                <a:cs typeface="Calibri"/>
+              </a:rPr>
+              <a:t> con Docker Compose, </a:t>
+            </a:r>
+            <a:r>
+              <a:rPr lang="en-US" sz="1200" dirty="0" err="1">
+                <a:solidFill>
+                  <a:srgbClr val="FFFFFF"/>
+                </a:solidFill>
+                <a:latin typeface="Calibri"/>
+                <a:ea typeface="Calibri"/>
+                <a:cs typeface="Calibri"/>
+              </a:rPr>
+              <a:t>che</a:t>
+            </a:r>
+            <a:r>
+              <a:rPr lang="en-US" sz="1200" dirty="0">
+                <a:solidFill>
+                  <a:srgbClr val="FFFFFF"/>
+                </a:solidFill>
+                <a:latin typeface="Calibri"/>
+                <a:ea typeface="Calibri"/>
+                <a:cs typeface="Calibri"/>
+              </a:rPr>
+              <a:t> orchestra 4 container con rete interna </a:t>
+            </a:r>
+            <a:r>
+              <a:rPr lang="en-US" sz="1200" dirty="0" err="1">
+                <a:solidFill>
+                  <a:srgbClr val="FFFFFF"/>
+                </a:solidFill>
+                <a:latin typeface="Calibri"/>
+                <a:ea typeface="Calibri"/>
+                <a:cs typeface="Calibri"/>
+              </a:rPr>
+              <a:t>condivisa</a:t>
+            </a:r>
+            <a:r>
+              <a:rPr lang="en-US" sz="1200" dirty="0">
+                <a:solidFill>
+                  <a:srgbClr val="FFFFFF"/>
+                </a:solidFill>
+                <a:latin typeface="Calibri"/>
+                <a:ea typeface="Calibri"/>
+                <a:cs typeface="Calibri"/>
+              </a:rPr>
+              <a:t> e </a:t>
+            </a:r>
+            <a:r>
+              <a:rPr lang="en-US" sz="1200" dirty="0" err="1">
+                <a:solidFill>
+                  <a:srgbClr val="FFFFFF"/>
+                </a:solidFill>
+                <a:latin typeface="Calibri"/>
+                <a:ea typeface="Calibri"/>
+                <a:cs typeface="Calibri"/>
+              </a:rPr>
+              <a:t>volumi</a:t>
+            </a:r>
+            <a:r>
+              <a:rPr lang="en-US" sz="1200" dirty="0">
+                <a:solidFill>
+                  <a:srgbClr val="FFFFFF"/>
+                </a:solidFill>
+                <a:latin typeface="Calibri"/>
+                <a:ea typeface="Calibri"/>
+                <a:cs typeface="Calibri"/>
+              </a:rPr>
+              <a:t> </a:t>
+            </a:r>
+            <a:r>
+              <a:rPr lang="en-US" sz="1200" dirty="0" err="1">
+                <a:solidFill>
+                  <a:srgbClr val="FFFFFF"/>
+                </a:solidFill>
+                <a:latin typeface="Calibri"/>
+                <a:ea typeface="Calibri"/>
+                <a:cs typeface="Calibri"/>
+              </a:rPr>
+              <a:t>persistenti</a:t>
+            </a:r>
+            <a:r>
+              <a:rPr lang="en-US" sz="1200" dirty="0">
+                <a:solidFill>
+                  <a:srgbClr val="FFFFFF"/>
+                </a:solidFill>
+                <a:latin typeface="Calibri"/>
+                <a:ea typeface="Calibri"/>
+                <a:cs typeface="Calibri"/>
+              </a:rPr>
+              <a:t> per </a:t>
+            </a:r>
+            <a:r>
+              <a:rPr lang="en-US" sz="1200" dirty="0" err="1">
+                <a:solidFill>
+                  <a:srgbClr val="FFFFFF"/>
+                </a:solidFill>
+                <a:latin typeface="Calibri"/>
+                <a:ea typeface="Calibri"/>
+                <a:cs typeface="Calibri"/>
+              </a:rPr>
+              <a:t>i</a:t>
+            </a:r>
+            <a:r>
+              <a:rPr lang="en-US" sz="1200" dirty="0">
+                <a:solidFill>
+                  <a:srgbClr val="FFFFFF"/>
+                </a:solidFill>
+                <a:latin typeface="Calibri"/>
+                <a:ea typeface="Calibri"/>
+                <a:cs typeface="Calibri"/>
+              </a:rPr>
+              <a:t> </a:t>
+            </a:r>
+            <a:r>
+              <a:rPr lang="en-US" sz="1200" dirty="0" err="1">
+                <a:solidFill>
+                  <a:srgbClr val="FFFFFF"/>
+                </a:solidFill>
+                <a:latin typeface="Calibri"/>
+                <a:ea typeface="Calibri"/>
+                <a:cs typeface="Calibri"/>
+              </a:rPr>
+              <a:t>dati</a:t>
+            </a:r>
+            <a:r>
+              <a:rPr lang="en-US" sz="1200" dirty="0">
+                <a:solidFill>
+                  <a:srgbClr val="FFFFFF"/>
+                </a:solidFill>
+                <a:latin typeface="Calibri"/>
+                <a:ea typeface="Calibri"/>
+                <a:cs typeface="Calibri"/>
+              </a:rPr>
+              <a:t>.</a:t>
+            </a:r>
+            <a:endParaRPr lang="en-US" sz="1200" dirty="0">
+              <a:latin typeface="Calibri"/>
+              <a:ea typeface="Calibri"/>
+              <a:cs typeface="Calibri"/>
+            </a:endParaRPr>
           </a:p>
         </p:txBody>
       </p:sp>
